--- a/TECH SOLUTIONS INFRAESTRUCTURA Y SOFTWARE - copia.pptx
+++ b/TECH SOLUTIONS INFRAESTRUCTURA Y SOFTWARE - copia.pptx
@@ -5,7 +5,7 @@
     <p:sldMasterId id="2147483672" r:id="rId1"/>
   </p:sldMasterIdLst>
   <p:notesMasterIdLst>
-    <p:notesMasterId r:id="rId7"/>
+    <p:notesMasterId r:id="rId11"/>
   </p:notesMasterIdLst>
   <p:sldIdLst>
     <p:sldId id="256" r:id="rId2"/>
@@ -13,6 +13,10 @@
     <p:sldId id="258" r:id="rId4"/>
     <p:sldId id="259" r:id="rId5"/>
     <p:sldId id="260" r:id="rId6"/>
+    <p:sldId id="261" r:id="rId7"/>
+    <p:sldId id="262" r:id="rId8"/>
+    <p:sldId id="263" r:id="rId9"/>
+    <p:sldId id="264" r:id="rId10"/>
   </p:sldIdLst>
   <p:sldSz cx="12192000" cy="6858000"/>
   <p:notesSz cx="6858000" cy="9144000"/>
@@ -204,7 +208,7 @@
           <a:p>
             <a:fld id="{0893F16D-E30D-40AF-82C5-6A1EFF521791}" type="datetimeFigureOut">
               <a:rPr lang="es-ES" smtClean="0"/>
-              <a:t>25/05/2026</a:t>
+              <a:t>28/05/2026</a:t>
             </a:fld>
             <a:endParaRPr lang="es-ES"/>
           </a:p>
@@ -631,6 +635,358 @@
 </p:notes>
 </file>
 
+<file path=ppt/notesSlides/notesSlide3.xml><?xml version="1.0" encoding="utf-8"?>
+<p:notes xmlns:a="http://schemas.openxmlformats.org/drawingml/2006/main" xmlns:r="http://schemas.openxmlformats.org/officeDocument/2006/relationships" xmlns:p="http://schemas.openxmlformats.org/presentationml/2006/main">
+  <p:cSld>
+    <p:spTree>
+      <p:nvGrpSpPr>
+        <p:cNvPr id="1" name=""/>
+        <p:cNvGrpSpPr/>
+        <p:nvPr/>
+      </p:nvGrpSpPr>
+      <p:grpSpPr>
+        <a:xfrm>
+          <a:off x="0" y="0"/>
+          <a:ext cx="0" cy="0"/>
+          <a:chOff x="0" y="0"/>
+          <a:chExt cx="0" cy="0"/>
+        </a:xfrm>
+      </p:grpSpPr>
+      <p:sp>
+        <p:nvSpPr>
+          <p:cNvPr id="2" name="Marcador de imagen de diapositiva 1"/>
+          <p:cNvSpPr>
+            <a:spLocks noGrp="1" noRot="1" noChangeAspect="1"/>
+          </p:cNvSpPr>
+          <p:nvPr>
+            <p:ph type="sldImg"/>
+          </p:nvPr>
+        </p:nvSpPr>
+        <p:spPr/>
+      </p:sp>
+      <p:sp>
+        <p:nvSpPr>
+          <p:cNvPr id="3" name="Marcador de notas 2"/>
+          <p:cNvSpPr>
+            <a:spLocks noGrp="1"/>
+          </p:cNvSpPr>
+          <p:nvPr>
+            <p:ph type="body" idx="1"/>
+          </p:nvPr>
+        </p:nvSpPr>
+        <p:spPr/>
+        <p:txBody>
+          <a:bodyPr/>
+          <a:lstStyle/>
+          <a:p>
+            <a:r>
+              <a:rPr lang="es-BO" dirty="0"/>
+              <a:t>Recordar  al cliente que el tiempo de respuesta para soporte crítico  en servidores es menor a 2 horas.</a:t>
+            </a:r>
+            <a:endParaRPr lang="es-ES" dirty="0"/>
+          </a:p>
+        </p:txBody>
+      </p:sp>
+      <p:sp>
+        <p:nvSpPr>
+          <p:cNvPr id="4" name="Marcador de número de diapositiva 3"/>
+          <p:cNvSpPr>
+            <a:spLocks noGrp="1"/>
+          </p:cNvSpPr>
+          <p:nvPr>
+            <p:ph type="sldNum" sz="quarter" idx="5"/>
+          </p:nvPr>
+        </p:nvSpPr>
+        <p:spPr/>
+        <p:txBody>
+          <a:bodyPr/>
+          <a:lstStyle/>
+          <a:p>
+            <a:fld id="{D6155B18-23DB-4418-A467-F96F378AD791}" type="slidenum">
+              <a:rPr lang="es-ES" smtClean="0"/>
+              <a:t>6</a:t>
+            </a:fld>
+            <a:endParaRPr lang="es-ES"/>
+          </a:p>
+        </p:txBody>
+      </p:sp>
+    </p:spTree>
+    <p:extLst>
+      <p:ext uri="{BB962C8B-B14F-4D97-AF65-F5344CB8AC3E}">
+        <p14:creationId xmlns:p14="http://schemas.microsoft.com/office/powerpoint/2010/main" val="1602985660"/>
+      </p:ext>
+    </p:extLst>
+  </p:cSld>
+  <p:clrMapOvr>
+    <a:masterClrMapping/>
+  </p:clrMapOvr>
+</p:notes>
+</file>
+
+<file path=ppt/notesSlides/notesSlide4.xml><?xml version="1.0" encoding="utf-8"?>
+<p:notes xmlns:a="http://schemas.openxmlformats.org/drawingml/2006/main" xmlns:r="http://schemas.openxmlformats.org/officeDocument/2006/relationships" xmlns:p="http://schemas.openxmlformats.org/presentationml/2006/main">
+  <p:cSld>
+    <p:spTree>
+      <p:nvGrpSpPr>
+        <p:cNvPr id="1" name=""/>
+        <p:cNvGrpSpPr/>
+        <p:nvPr/>
+      </p:nvGrpSpPr>
+      <p:grpSpPr>
+        <a:xfrm>
+          <a:off x="0" y="0"/>
+          <a:ext cx="0" cy="0"/>
+          <a:chOff x="0" y="0"/>
+          <a:chExt cx="0" cy="0"/>
+        </a:xfrm>
+      </p:grpSpPr>
+      <p:sp>
+        <p:nvSpPr>
+          <p:cNvPr id="2" name="Marcador de imagen de diapositiva 1"/>
+          <p:cNvSpPr>
+            <a:spLocks noGrp="1" noRot="1" noChangeAspect="1"/>
+          </p:cNvSpPr>
+          <p:nvPr>
+            <p:ph type="sldImg"/>
+          </p:nvPr>
+        </p:nvSpPr>
+        <p:spPr/>
+      </p:sp>
+      <p:sp>
+        <p:nvSpPr>
+          <p:cNvPr id="3" name="Marcador de notas 2"/>
+          <p:cNvSpPr>
+            <a:spLocks noGrp="1"/>
+          </p:cNvSpPr>
+          <p:nvPr>
+            <p:ph type="body" idx="1"/>
+          </p:nvPr>
+        </p:nvSpPr>
+        <p:spPr/>
+        <p:txBody>
+          <a:bodyPr/>
+          <a:lstStyle/>
+          <a:p>
+            <a:r>
+              <a:rPr lang="es-BO" dirty="0"/>
+              <a:t>Recordar  al cliente que el tiempo de respuesta para soporte crítico  en servidores es menor a 2 horas.</a:t>
+            </a:r>
+            <a:endParaRPr lang="es-ES" dirty="0"/>
+          </a:p>
+        </p:txBody>
+      </p:sp>
+      <p:sp>
+        <p:nvSpPr>
+          <p:cNvPr id="4" name="Marcador de número de diapositiva 3"/>
+          <p:cNvSpPr>
+            <a:spLocks noGrp="1"/>
+          </p:cNvSpPr>
+          <p:nvPr>
+            <p:ph type="sldNum" sz="quarter" idx="5"/>
+          </p:nvPr>
+        </p:nvSpPr>
+        <p:spPr/>
+        <p:txBody>
+          <a:bodyPr/>
+          <a:lstStyle/>
+          <a:p>
+            <a:fld id="{D6155B18-23DB-4418-A467-F96F378AD791}" type="slidenum">
+              <a:rPr lang="es-ES" smtClean="0"/>
+              <a:t>7</a:t>
+            </a:fld>
+            <a:endParaRPr lang="es-ES"/>
+          </a:p>
+        </p:txBody>
+      </p:sp>
+    </p:spTree>
+    <p:extLst>
+      <p:ext uri="{BB962C8B-B14F-4D97-AF65-F5344CB8AC3E}">
+        <p14:creationId xmlns:p14="http://schemas.microsoft.com/office/powerpoint/2010/main" val="2725271448"/>
+      </p:ext>
+    </p:extLst>
+  </p:cSld>
+  <p:clrMapOvr>
+    <a:masterClrMapping/>
+  </p:clrMapOvr>
+</p:notes>
+</file>
+
+<file path=ppt/notesSlides/notesSlide5.xml><?xml version="1.0" encoding="utf-8"?>
+<p:notes xmlns:a="http://schemas.openxmlformats.org/drawingml/2006/main" xmlns:r="http://schemas.openxmlformats.org/officeDocument/2006/relationships" xmlns:p="http://schemas.openxmlformats.org/presentationml/2006/main">
+  <p:cSld>
+    <p:spTree>
+      <p:nvGrpSpPr>
+        <p:cNvPr id="1" name=""/>
+        <p:cNvGrpSpPr/>
+        <p:nvPr/>
+      </p:nvGrpSpPr>
+      <p:grpSpPr>
+        <a:xfrm>
+          <a:off x="0" y="0"/>
+          <a:ext cx="0" cy="0"/>
+          <a:chOff x="0" y="0"/>
+          <a:chExt cx="0" cy="0"/>
+        </a:xfrm>
+      </p:grpSpPr>
+      <p:sp>
+        <p:nvSpPr>
+          <p:cNvPr id="2" name="Marcador de imagen de diapositiva 1"/>
+          <p:cNvSpPr>
+            <a:spLocks noGrp="1" noRot="1" noChangeAspect="1"/>
+          </p:cNvSpPr>
+          <p:nvPr>
+            <p:ph type="sldImg"/>
+          </p:nvPr>
+        </p:nvSpPr>
+        <p:spPr/>
+      </p:sp>
+      <p:sp>
+        <p:nvSpPr>
+          <p:cNvPr id="3" name="Marcador de notas 2"/>
+          <p:cNvSpPr>
+            <a:spLocks noGrp="1"/>
+          </p:cNvSpPr>
+          <p:nvPr>
+            <p:ph type="body" idx="1"/>
+          </p:nvPr>
+        </p:nvSpPr>
+        <p:spPr/>
+        <p:txBody>
+          <a:bodyPr/>
+          <a:lstStyle/>
+          <a:p>
+            <a:r>
+              <a:rPr lang="es-BO" dirty="0"/>
+              <a:t>Recordar  al cliente que el tiempo de respuesta para soporte crítico  en servidores es menor a 2 horas.</a:t>
+            </a:r>
+            <a:endParaRPr lang="es-ES" dirty="0"/>
+          </a:p>
+        </p:txBody>
+      </p:sp>
+      <p:sp>
+        <p:nvSpPr>
+          <p:cNvPr id="4" name="Marcador de número de diapositiva 3"/>
+          <p:cNvSpPr>
+            <a:spLocks noGrp="1"/>
+          </p:cNvSpPr>
+          <p:nvPr>
+            <p:ph type="sldNum" sz="quarter" idx="5"/>
+          </p:nvPr>
+        </p:nvSpPr>
+        <p:spPr/>
+        <p:txBody>
+          <a:bodyPr/>
+          <a:lstStyle/>
+          <a:p>
+            <a:fld id="{D6155B18-23DB-4418-A467-F96F378AD791}" type="slidenum">
+              <a:rPr lang="es-ES" smtClean="0"/>
+              <a:t>8</a:t>
+            </a:fld>
+            <a:endParaRPr lang="es-ES"/>
+          </a:p>
+        </p:txBody>
+      </p:sp>
+    </p:spTree>
+    <p:extLst>
+      <p:ext uri="{BB962C8B-B14F-4D97-AF65-F5344CB8AC3E}">
+        <p14:creationId xmlns:p14="http://schemas.microsoft.com/office/powerpoint/2010/main" val="2279316798"/>
+      </p:ext>
+    </p:extLst>
+  </p:cSld>
+  <p:clrMapOvr>
+    <a:masterClrMapping/>
+  </p:clrMapOvr>
+</p:notes>
+</file>
+
+<file path=ppt/notesSlides/notesSlide6.xml><?xml version="1.0" encoding="utf-8"?>
+<p:notes xmlns:a="http://schemas.openxmlformats.org/drawingml/2006/main" xmlns:r="http://schemas.openxmlformats.org/officeDocument/2006/relationships" xmlns:p="http://schemas.openxmlformats.org/presentationml/2006/main">
+  <p:cSld>
+    <p:spTree>
+      <p:nvGrpSpPr>
+        <p:cNvPr id="1" name=""/>
+        <p:cNvGrpSpPr/>
+        <p:nvPr/>
+      </p:nvGrpSpPr>
+      <p:grpSpPr>
+        <a:xfrm>
+          <a:off x="0" y="0"/>
+          <a:ext cx="0" cy="0"/>
+          <a:chOff x="0" y="0"/>
+          <a:chExt cx="0" cy="0"/>
+        </a:xfrm>
+      </p:grpSpPr>
+      <p:sp>
+        <p:nvSpPr>
+          <p:cNvPr id="2" name="Marcador de imagen de diapositiva 1"/>
+          <p:cNvSpPr>
+            <a:spLocks noGrp="1" noRot="1" noChangeAspect="1"/>
+          </p:cNvSpPr>
+          <p:nvPr>
+            <p:ph type="sldImg"/>
+          </p:nvPr>
+        </p:nvSpPr>
+        <p:spPr/>
+      </p:sp>
+      <p:sp>
+        <p:nvSpPr>
+          <p:cNvPr id="3" name="Marcador de notas 2"/>
+          <p:cNvSpPr>
+            <a:spLocks noGrp="1"/>
+          </p:cNvSpPr>
+          <p:nvPr>
+            <p:ph type="body" idx="1"/>
+          </p:nvPr>
+        </p:nvSpPr>
+        <p:spPr/>
+        <p:txBody>
+          <a:bodyPr/>
+          <a:lstStyle/>
+          <a:p>
+            <a:r>
+              <a:rPr lang="es-BO" dirty="0"/>
+              <a:t>Recordar  al cliente que el tiempo de respuesta para soporte crítico  en servidores es menor a 2 horas.</a:t>
+            </a:r>
+            <a:endParaRPr lang="es-ES" dirty="0"/>
+          </a:p>
+        </p:txBody>
+      </p:sp>
+      <p:sp>
+        <p:nvSpPr>
+          <p:cNvPr id="4" name="Marcador de número de diapositiva 3"/>
+          <p:cNvSpPr>
+            <a:spLocks noGrp="1"/>
+          </p:cNvSpPr>
+          <p:nvPr>
+            <p:ph type="sldNum" sz="quarter" idx="5"/>
+          </p:nvPr>
+        </p:nvSpPr>
+        <p:spPr/>
+        <p:txBody>
+          <a:bodyPr/>
+          <a:lstStyle/>
+          <a:p>
+            <a:fld id="{D6155B18-23DB-4418-A467-F96F378AD791}" type="slidenum">
+              <a:rPr lang="es-ES" smtClean="0"/>
+              <a:t>9</a:t>
+            </a:fld>
+            <a:endParaRPr lang="es-ES"/>
+          </a:p>
+        </p:txBody>
+      </p:sp>
+    </p:spTree>
+    <p:extLst>
+      <p:ext uri="{BB962C8B-B14F-4D97-AF65-F5344CB8AC3E}">
+        <p14:creationId xmlns:p14="http://schemas.microsoft.com/office/powerpoint/2010/main" val="3738873882"/>
+      </p:ext>
+    </p:extLst>
+  </p:cSld>
+  <p:clrMapOvr>
+    <a:masterClrMapping/>
+  </p:clrMapOvr>
+</p:notes>
+</file>
+
 <file path=ppt/slideLayouts/slideLayout1.xml><?xml version="1.0" encoding="utf-8"?>
 <p:sldLayout xmlns:a="http://schemas.openxmlformats.org/drawingml/2006/main" xmlns:r="http://schemas.openxmlformats.org/officeDocument/2006/relationships" xmlns:p="http://schemas.openxmlformats.org/presentationml/2006/main" type="title" preserve="1">
   <p:cSld name="Diapositiva de título">
@@ -762,7 +1118,7 @@
           <a:p>
             <a:fld id="{921EC4BB-8172-4F9D-BD95-A0C71EAB79E1}" type="datetimeFigureOut">
               <a:rPr lang="es-ES" smtClean="0"/>
-              <a:t>25/05/2026</a:t>
+              <a:t>28/05/2026</a:t>
             </a:fld>
             <a:endParaRPr lang="es-ES"/>
           </a:p>
@@ -932,7 +1288,7 @@
           <a:p>
             <a:fld id="{921EC4BB-8172-4F9D-BD95-A0C71EAB79E1}" type="datetimeFigureOut">
               <a:rPr lang="es-ES" smtClean="0"/>
-              <a:t>25/05/2026</a:t>
+              <a:t>28/05/2026</a:t>
             </a:fld>
             <a:endParaRPr lang="es-ES"/>
           </a:p>
@@ -1112,7 +1468,7 @@
           <a:p>
             <a:fld id="{921EC4BB-8172-4F9D-BD95-A0C71EAB79E1}" type="datetimeFigureOut">
               <a:rPr lang="es-ES" smtClean="0"/>
-              <a:t>25/05/2026</a:t>
+              <a:t>28/05/2026</a:t>
             </a:fld>
             <a:endParaRPr lang="es-ES"/>
           </a:p>
@@ -1282,7 +1638,7 @@
           <a:p>
             <a:fld id="{921EC4BB-8172-4F9D-BD95-A0C71EAB79E1}" type="datetimeFigureOut">
               <a:rPr lang="es-ES" smtClean="0"/>
-              <a:t>25/05/2026</a:t>
+              <a:t>28/05/2026</a:t>
             </a:fld>
             <a:endParaRPr lang="es-ES"/>
           </a:p>
@@ -1528,7 +1884,7 @@
           <a:p>
             <a:fld id="{921EC4BB-8172-4F9D-BD95-A0C71EAB79E1}" type="datetimeFigureOut">
               <a:rPr lang="es-ES" smtClean="0"/>
-              <a:t>25/05/2026</a:t>
+              <a:t>28/05/2026</a:t>
             </a:fld>
             <a:endParaRPr lang="es-ES"/>
           </a:p>
@@ -1760,7 +2116,7 @@
           <a:p>
             <a:fld id="{921EC4BB-8172-4F9D-BD95-A0C71EAB79E1}" type="datetimeFigureOut">
               <a:rPr lang="es-ES" smtClean="0"/>
-              <a:t>25/05/2026</a:t>
+              <a:t>28/05/2026</a:t>
             </a:fld>
             <a:endParaRPr lang="es-ES"/>
           </a:p>
@@ -2127,7 +2483,7 @@
           <a:p>
             <a:fld id="{921EC4BB-8172-4F9D-BD95-A0C71EAB79E1}" type="datetimeFigureOut">
               <a:rPr lang="es-ES" smtClean="0"/>
-              <a:t>25/05/2026</a:t>
+              <a:t>28/05/2026</a:t>
             </a:fld>
             <a:endParaRPr lang="es-ES"/>
           </a:p>
@@ -2245,7 +2601,7 @@
           <a:p>
             <a:fld id="{921EC4BB-8172-4F9D-BD95-A0C71EAB79E1}" type="datetimeFigureOut">
               <a:rPr lang="es-ES" smtClean="0"/>
-              <a:t>25/05/2026</a:t>
+              <a:t>28/05/2026</a:t>
             </a:fld>
             <a:endParaRPr lang="es-ES"/>
           </a:p>
@@ -2340,7 +2696,7 @@
           <a:p>
             <a:fld id="{921EC4BB-8172-4F9D-BD95-A0C71EAB79E1}" type="datetimeFigureOut">
               <a:rPr lang="es-ES" smtClean="0"/>
-              <a:t>25/05/2026</a:t>
+              <a:t>28/05/2026</a:t>
             </a:fld>
             <a:endParaRPr lang="es-ES"/>
           </a:p>
@@ -2617,7 +2973,7 @@
           <a:p>
             <a:fld id="{921EC4BB-8172-4F9D-BD95-A0C71EAB79E1}" type="datetimeFigureOut">
               <a:rPr lang="es-ES" smtClean="0"/>
-              <a:t>25/05/2026</a:t>
+              <a:t>28/05/2026</a:t>
             </a:fld>
             <a:endParaRPr lang="es-ES"/>
           </a:p>
@@ -2874,7 +3230,7 @@
           <a:p>
             <a:fld id="{921EC4BB-8172-4F9D-BD95-A0C71EAB79E1}" type="datetimeFigureOut">
               <a:rPr lang="es-ES" smtClean="0"/>
-              <a:t>25/05/2026</a:t>
+              <a:t>28/05/2026</a:t>
             </a:fld>
             <a:endParaRPr lang="es-ES"/>
           </a:p>
@@ -3087,7 +3443,7 @@
           <a:p>
             <a:fld id="{921EC4BB-8172-4F9D-BD95-A0C71EAB79E1}" type="datetimeFigureOut">
               <a:rPr lang="es-ES" smtClean="0"/>
-              <a:t>25/05/2026</a:t>
+              <a:t>28/05/2026</a:t>
             </a:fld>
             <a:endParaRPr lang="es-ES"/>
           </a:p>
@@ -4993,6 +5349,702 @@
       </p:transition>
     </mc:Choice>
     <mc:Fallback xmlns="">
+      <p:transition spd="slow">
+        <p:fade/>
+      </p:transition>
+    </mc:Fallback>
+  </mc:AlternateContent>
+</p:sld>
+</file>
+
+<file path=ppt/slides/slide6.xml><?xml version="1.0" encoding="utf-8"?>
+<p:sld xmlns:a="http://schemas.openxmlformats.org/drawingml/2006/main" xmlns:r="http://schemas.openxmlformats.org/officeDocument/2006/relationships" xmlns:p="http://schemas.openxmlformats.org/presentationml/2006/main">
+  <p:cSld>
+    <p:spTree>
+      <p:nvGrpSpPr>
+        <p:cNvPr id="1" name=""/>
+        <p:cNvGrpSpPr/>
+        <p:nvPr/>
+      </p:nvGrpSpPr>
+      <p:grpSpPr>
+        <a:xfrm>
+          <a:off x="0" y="0"/>
+          <a:ext cx="0" cy="0"/>
+          <a:chOff x="0" y="0"/>
+          <a:chExt cx="0" cy="0"/>
+        </a:xfrm>
+      </p:grpSpPr>
+      <p:sp>
+        <p:nvSpPr>
+          <p:cNvPr id="2" name="Título 1">
+            <a:extLst>
+              <a:ext uri="{FF2B5EF4-FFF2-40B4-BE49-F238E27FC236}">
+                <a16:creationId xmlns:a16="http://schemas.microsoft.com/office/drawing/2014/main" id="{2FDD10A6-6C56-1D15-92A0-622B059FC5D3}"/>
+              </a:ext>
+            </a:extLst>
+          </p:cNvPr>
+          <p:cNvSpPr>
+            <a:spLocks noGrp="1"/>
+          </p:cNvSpPr>
+          <p:nvPr>
+            <p:ph type="title"/>
+          </p:nvPr>
+        </p:nvSpPr>
+        <p:spPr/>
+        <p:txBody>
+          <a:bodyPr>
+            <a:normAutofit fontScale="90000"/>
+          </a:bodyPr>
+          <a:lstStyle/>
+          <a:p>
+            <a:pPr algn="ctr"/>
+            <a:r>
+              <a:rPr lang="es-BO" sz="5400" dirty="0">
+                <a:solidFill>
+                  <a:srgbClr val="56FA04"/>
+                </a:solidFill>
+                <a:latin typeface="Algerian" panose="04020705040A02060702" pitchFamily="82" charset="0"/>
+              </a:rPr>
+              <a:t>Auditoría de gastos operativos</a:t>
+            </a:r>
+            <a:endParaRPr lang="es-ES" sz="5400" dirty="0">
+              <a:solidFill>
+                <a:srgbClr val="56FA04"/>
+              </a:solidFill>
+              <a:latin typeface="Algerian" panose="04020705040A02060702" pitchFamily="82" charset="0"/>
+            </a:endParaRPr>
+          </a:p>
+        </p:txBody>
+      </p:sp>
+      <p:sp>
+        <p:nvSpPr>
+          <p:cNvPr id="3" name="Marcador de contenido 2">
+            <a:extLst>
+              <a:ext uri="{FF2B5EF4-FFF2-40B4-BE49-F238E27FC236}">
+                <a16:creationId xmlns:a16="http://schemas.microsoft.com/office/drawing/2014/main" id="{D26A52DB-0D42-33EE-6F1C-D405E1119F0B}"/>
+              </a:ext>
+            </a:extLst>
+          </p:cNvPr>
+          <p:cNvSpPr>
+            <a:spLocks noGrp="1"/>
+          </p:cNvSpPr>
+          <p:nvPr>
+            <p:ph idx="1"/>
+          </p:nvPr>
+        </p:nvSpPr>
+        <p:spPr/>
+        <p:txBody>
+          <a:bodyPr>
+            <a:normAutofit/>
+          </a:bodyPr>
+          <a:lstStyle/>
+          <a:p>
+            <a:pPr marL="0" indent="0">
+              <a:buNone/>
+            </a:pPr>
+            <a:r>
+              <a:rPr lang="es-BO" sz="3200" dirty="0"/>
+              <a:t>Evaluación automática de la necesidad de software adquirido.</a:t>
+            </a:r>
+            <a:endParaRPr lang="es-ES" sz="3200" dirty="0"/>
+          </a:p>
+        </p:txBody>
+      </p:sp>
+      <p:graphicFrame>
+        <p:nvGraphicFramePr>
+          <p:cNvPr id="6" name="Objeto 5">
+            <a:extLst>
+              <a:ext uri="{FF2B5EF4-FFF2-40B4-BE49-F238E27FC236}">
+                <a16:creationId xmlns:a16="http://schemas.microsoft.com/office/drawing/2014/main" id="{839E4CE6-7292-6EE3-474E-F7F085D28B4D}"/>
+              </a:ext>
+            </a:extLst>
+          </p:cNvPr>
+          <p:cNvGraphicFramePr>
+            <a:graphicFrameLocks noChangeAspect="1"/>
+          </p:cNvGraphicFramePr>
+          <p:nvPr>
+            <p:extLst>
+              <p:ext uri="{D42A27DB-BD31-4B8C-83A1-F6EECF244321}">
+                <p14:modId xmlns:p14="http://schemas.microsoft.com/office/powerpoint/2010/main" val="528501165"/>
+              </p:ext>
+            </p:extLst>
+          </p:nvPr>
+        </p:nvGraphicFramePr>
+        <p:xfrm>
+          <a:off x="2177143" y="3016427"/>
+          <a:ext cx="7837714" cy="2208715"/>
+        </p:xfrm>
+        <a:graphic>
+          <a:graphicData uri="http://schemas.openxmlformats.org/presentationml/2006/ole">
+            <mc:AlternateContent xmlns:mc="http://schemas.openxmlformats.org/markup-compatibility/2006">
+              <mc:Choice xmlns:v="urn:schemas-microsoft-com:vml" Requires="v">
+                <p:oleObj name="Worksheet" r:id="rId3" imgW="5669280" imgH="1470723" progId="Excel.Sheet.12">
+                  <p:link updateAutomatic="1"/>
+                </p:oleObj>
+              </mc:Choice>
+              <mc:Fallback>
+                <p:oleObj name="Worksheet" r:id="rId3" imgW="5669280" imgH="1470723" progId="Excel.Sheet.12">
+                  <p:link updateAutomatic="1"/>
+                  <p:pic>
+                    <p:nvPicPr>
+                      <p:cNvPr id="0" name=""/>
+                      <p:cNvPicPr/>
+                      <p:nvPr/>
+                    </p:nvPicPr>
+                    <p:blipFill>
+                      <a:blip r:embed="rId4"/>
+                      <a:stretch>
+                        <a:fillRect/>
+                      </a:stretch>
+                    </p:blipFill>
+                    <p:spPr>
+                      <a:xfrm>
+                        <a:off x="2177143" y="3016427"/>
+                        <a:ext cx="7837714" cy="2208715"/>
+                      </a:xfrm>
+                      <a:prstGeom prst="rect">
+                        <a:avLst/>
+                      </a:prstGeom>
+                    </p:spPr>
+                  </p:pic>
+                </p:oleObj>
+              </mc:Fallback>
+            </mc:AlternateContent>
+          </a:graphicData>
+        </a:graphic>
+      </p:graphicFrame>
+    </p:spTree>
+    <p:extLst>
+      <p:ext uri="{BB962C8B-B14F-4D97-AF65-F5344CB8AC3E}">
+        <p14:creationId xmlns:p14="http://schemas.microsoft.com/office/powerpoint/2010/main" val="1043432690"/>
+      </p:ext>
+    </p:extLst>
+  </p:cSld>
+  <p:clrMapOvr>
+    <a:masterClrMapping/>
+  </p:clrMapOvr>
+  <mc:AlternateContent xmlns:mc="http://schemas.openxmlformats.org/markup-compatibility/2006">
+    <mc:Choice xmlns:p159="http://schemas.microsoft.com/office/powerpoint/2015/09/main" Requires="p159">
+      <p:transition xmlns:p14="http://schemas.microsoft.com/office/powerpoint/2010/main" spd="slow" p14:dur="2000">
+        <p159:morph option="byObject"/>
+      </p:transition>
+    </mc:Choice>
+    <mc:Fallback>
+      <p:transition spd="slow">
+        <p:fade/>
+      </p:transition>
+    </mc:Fallback>
+  </mc:AlternateContent>
+</p:sld>
+</file>
+
+<file path=ppt/slides/slide7.xml><?xml version="1.0" encoding="utf-8"?>
+<p:sld xmlns:a="http://schemas.openxmlformats.org/drawingml/2006/main" xmlns:r="http://schemas.openxmlformats.org/officeDocument/2006/relationships" xmlns:p="http://schemas.openxmlformats.org/presentationml/2006/main">
+  <p:cSld>
+    <p:spTree>
+      <p:nvGrpSpPr>
+        <p:cNvPr id="1" name=""/>
+        <p:cNvGrpSpPr/>
+        <p:nvPr/>
+      </p:nvGrpSpPr>
+      <p:grpSpPr>
+        <a:xfrm>
+          <a:off x="0" y="0"/>
+          <a:ext cx="0" cy="0"/>
+          <a:chOff x="0" y="0"/>
+          <a:chExt cx="0" cy="0"/>
+        </a:xfrm>
+      </p:grpSpPr>
+      <p:sp>
+        <p:nvSpPr>
+          <p:cNvPr id="2" name="Título 1">
+            <a:extLst>
+              <a:ext uri="{FF2B5EF4-FFF2-40B4-BE49-F238E27FC236}">
+                <a16:creationId xmlns:a16="http://schemas.microsoft.com/office/drawing/2014/main" id="{2FDD10A6-6C56-1D15-92A0-622B059FC5D3}"/>
+              </a:ext>
+            </a:extLst>
+          </p:cNvPr>
+          <p:cNvSpPr>
+            <a:spLocks noGrp="1"/>
+          </p:cNvSpPr>
+          <p:nvPr>
+            <p:ph type="title"/>
+          </p:nvPr>
+        </p:nvSpPr>
+        <p:spPr/>
+        <p:txBody>
+          <a:bodyPr>
+            <a:normAutofit/>
+          </a:bodyPr>
+          <a:lstStyle/>
+          <a:p>
+            <a:pPr algn="ctr"/>
+            <a:r>
+              <a:rPr lang="es-BO" sz="5400" dirty="0">
+                <a:solidFill>
+                  <a:srgbClr val="56FA04"/>
+                </a:solidFill>
+                <a:latin typeface="Algerian" panose="04020705040A02060702" pitchFamily="82" charset="0"/>
+              </a:rPr>
+              <a:t>MATRICES DE DECISIÓN LÓGICA</a:t>
+            </a:r>
+            <a:endParaRPr lang="es-ES" sz="5400" dirty="0">
+              <a:solidFill>
+                <a:srgbClr val="56FA04"/>
+              </a:solidFill>
+              <a:latin typeface="Algerian" panose="04020705040A02060702" pitchFamily="82" charset="0"/>
+            </a:endParaRPr>
+          </a:p>
+        </p:txBody>
+      </p:sp>
+      <p:sp>
+        <p:nvSpPr>
+          <p:cNvPr id="3" name="Marcador de contenido 2">
+            <a:extLst>
+              <a:ext uri="{FF2B5EF4-FFF2-40B4-BE49-F238E27FC236}">
+                <a16:creationId xmlns:a16="http://schemas.microsoft.com/office/drawing/2014/main" id="{D26A52DB-0D42-33EE-6F1C-D405E1119F0B}"/>
+              </a:ext>
+            </a:extLst>
+          </p:cNvPr>
+          <p:cNvSpPr>
+            <a:spLocks noGrp="1"/>
+          </p:cNvSpPr>
+          <p:nvPr>
+            <p:ph idx="1"/>
+          </p:nvPr>
+        </p:nvSpPr>
+        <p:spPr/>
+        <p:txBody>
+          <a:bodyPr>
+            <a:normAutofit/>
+          </a:bodyPr>
+          <a:lstStyle/>
+          <a:p>
+            <a:pPr marL="0" indent="0">
+              <a:buNone/>
+            </a:pPr>
+            <a:r>
+              <a:rPr lang="es-BO" sz="3200" dirty="0"/>
+              <a:t>Filtros avanzados para la optimización de recursos e imprevistos.</a:t>
+            </a:r>
+            <a:endParaRPr lang="es-ES" sz="3200" dirty="0"/>
+          </a:p>
+        </p:txBody>
+      </p:sp>
+      <p:graphicFrame>
+        <p:nvGraphicFramePr>
+          <p:cNvPr id="6" name="Objeto 5">
+            <a:extLst>
+              <a:ext uri="{FF2B5EF4-FFF2-40B4-BE49-F238E27FC236}">
+                <a16:creationId xmlns:a16="http://schemas.microsoft.com/office/drawing/2014/main" id="{37DC2583-D2D9-036A-FCD4-960B535A399D}"/>
+              </a:ext>
+            </a:extLst>
+          </p:cNvPr>
+          <p:cNvGraphicFramePr>
+            <a:graphicFrameLocks noChangeAspect="1"/>
+          </p:cNvGraphicFramePr>
+          <p:nvPr>
+            <p:extLst>
+              <p:ext uri="{D42A27DB-BD31-4B8C-83A1-F6EECF244321}">
+                <p14:modId xmlns:p14="http://schemas.microsoft.com/office/powerpoint/2010/main" val="3104449012"/>
+              </p:ext>
+            </p:extLst>
+          </p:nvPr>
+        </p:nvGraphicFramePr>
+        <p:xfrm>
+          <a:off x="1074032" y="3013788"/>
+          <a:ext cx="9617733" cy="2127379"/>
+        </p:xfrm>
+        <a:graphic>
+          <a:graphicData uri="http://schemas.openxmlformats.org/presentationml/2006/ole">
+            <mc:AlternateContent xmlns:mc="http://schemas.openxmlformats.org/markup-compatibility/2006">
+              <mc:Choice xmlns:v="urn:schemas-microsoft-com:vml" Requires="v">
+                <p:oleObj name="Worksheet" r:id="rId3" imgW="7376018" imgH="1470723" progId="Excel.Sheet.12">
+                  <p:link updateAutomatic="1"/>
+                </p:oleObj>
+              </mc:Choice>
+              <mc:Fallback>
+                <p:oleObj name="Worksheet" r:id="rId3" imgW="7376018" imgH="1470723" progId="Excel.Sheet.12">
+                  <p:link updateAutomatic="1"/>
+                  <p:pic>
+                    <p:nvPicPr>
+                      <p:cNvPr id="0" name=""/>
+                      <p:cNvPicPr/>
+                      <p:nvPr/>
+                    </p:nvPicPr>
+                    <p:blipFill>
+                      <a:blip r:embed="rId4"/>
+                      <a:stretch>
+                        <a:fillRect/>
+                      </a:stretch>
+                    </p:blipFill>
+                    <p:spPr>
+                      <a:xfrm>
+                        <a:off x="1074032" y="3013788"/>
+                        <a:ext cx="9617733" cy="2127379"/>
+                      </a:xfrm>
+                      <a:prstGeom prst="rect">
+                        <a:avLst/>
+                      </a:prstGeom>
+                    </p:spPr>
+                  </p:pic>
+                </p:oleObj>
+              </mc:Fallback>
+            </mc:AlternateContent>
+          </a:graphicData>
+        </a:graphic>
+      </p:graphicFrame>
+    </p:spTree>
+    <p:extLst>
+      <p:ext uri="{BB962C8B-B14F-4D97-AF65-F5344CB8AC3E}">
+        <p14:creationId xmlns:p14="http://schemas.microsoft.com/office/powerpoint/2010/main" val="1002642910"/>
+      </p:ext>
+    </p:extLst>
+  </p:cSld>
+  <p:clrMapOvr>
+    <a:masterClrMapping/>
+  </p:clrMapOvr>
+  <mc:AlternateContent xmlns:mc="http://schemas.openxmlformats.org/markup-compatibility/2006">
+    <mc:Choice xmlns:p159="http://schemas.microsoft.com/office/powerpoint/2015/09/main" Requires="p159">
+      <p:transition xmlns:p14="http://schemas.microsoft.com/office/powerpoint/2010/main" spd="slow" p14:dur="2000">
+        <p159:morph option="byObject"/>
+      </p:transition>
+    </mc:Choice>
+    <mc:Fallback>
+      <p:transition spd="slow">
+        <p:fade/>
+      </p:transition>
+    </mc:Fallback>
+  </mc:AlternateContent>
+</p:sld>
+</file>
+
+<file path=ppt/slides/slide8.xml><?xml version="1.0" encoding="utf-8"?>
+<p:sld xmlns:a="http://schemas.openxmlformats.org/drawingml/2006/main" xmlns:r="http://schemas.openxmlformats.org/officeDocument/2006/relationships" xmlns:p="http://schemas.openxmlformats.org/presentationml/2006/main">
+  <p:cSld>
+    <p:spTree>
+      <p:nvGrpSpPr>
+        <p:cNvPr id="1" name=""/>
+        <p:cNvGrpSpPr/>
+        <p:nvPr/>
+      </p:nvGrpSpPr>
+      <p:grpSpPr>
+        <a:xfrm>
+          <a:off x="0" y="0"/>
+          <a:ext cx="0" cy="0"/>
+          <a:chOff x="0" y="0"/>
+          <a:chExt cx="0" cy="0"/>
+        </a:xfrm>
+      </p:grpSpPr>
+      <p:sp>
+        <p:nvSpPr>
+          <p:cNvPr id="2" name="Título 1">
+            <a:extLst>
+              <a:ext uri="{FF2B5EF4-FFF2-40B4-BE49-F238E27FC236}">
+                <a16:creationId xmlns:a16="http://schemas.microsoft.com/office/drawing/2014/main" id="{2FDD10A6-6C56-1D15-92A0-622B059FC5D3}"/>
+              </a:ext>
+            </a:extLst>
+          </p:cNvPr>
+          <p:cNvSpPr>
+            <a:spLocks noGrp="1"/>
+          </p:cNvSpPr>
+          <p:nvPr>
+            <p:ph type="title"/>
+          </p:nvPr>
+        </p:nvSpPr>
+        <p:spPr/>
+        <p:txBody>
+          <a:bodyPr>
+            <a:normAutofit fontScale="90000"/>
+          </a:bodyPr>
+          <a:lstStyle/>
+          <a:p>
+            <a:pPr algn="ctr"/>
+            <a:r>
+              <a:rPr lang="es-BO" sz="5400" dirty="0">
+                <a:solidFill>
+                  <a:srgbClr val="56FA04"/>
+                </a:solidFill>
+                <a:latin typeface="Algerian" panose="04020705040A02060702" pitchFamily="82" charset="0"/>
+              </a:rPr>
+              <a:t>RESUMEN DE INVERSIÓN POR CATEGORÍA</a:t>
+            </a:r>
+            <a:endParaRPr lang="es-ES" sz="5400" dirty="0">
+              <a:solidFill>
+                <a:srgbClr val="56FA04"/>
+              </a:solidFill>
+              <a:latin typeface="Algerian" panose="04020705040A02060702" pitchFamily="82" charset="0"/>
+            </a:endParaRPr>
+          </a:p>
+        </p:txBody>
+      </p:sp>
+      <p:sp>
+        <p:nvSpPr>
+          <p:cNvPr id="3" name="Marcador de contenido 2">
+            <a:extLst>
+              <a:ext uri="{FF2B5EF4-FFF2-40B4-BE49-F238E27FC236}">
+                <a16:creationId xmlns:a16="http://schemas.microsoft.com/office/drawing/2014/main" id="{D26A52DB-0D42-33EE-6F1C-D405E1119F0B}"/>
+              </a:ext>
+            </a:extLst>
+          </p:cNvPr>
+          <p:cNvSpPr>
+            <a:spLocks noGrp="1"/>
+          </p:cNvSpPr>
+          <p:nvPr>
+            <p:ph idx="1"/>
+          </p:nvPr>
+        </p:nvSpPr>
+        <p:spPr/>
+        <p:txBody>
+          <a:bodyPr>
+            <a:normAutofit/>
+          </a:bodyPr>
+          <a:lstStyle/>
+          <a:p>
+            <a:pPr marL="0" indent="0">
+              <a:buNone/>
+            </a:pPr>
+            <a:r>
+              <a:rPr lang="es-BO" sz="3200" dirty="0"/>
+              <a:t>Monitoreo dinámico del capital tecnológico.</a:t>
+            </a:r>
+          </a:p>
+          <a:p>
+            <a:pPr marL="0" indent="0">
+              <a:buNone/>
+            </a:pPr>
+            <a:endParaRPr lang="es-ES" sz="3200" dirty="0"/>
+          </a:p>
+        </p:txBody>
+      </p:sp>
+      <p:graphicFrame>
+        <p:nvGraphicFramePr>
+          <p:cNvPr id="4" name="Objeto 3">
+            <a:extLst>
+              <a:ext uri="{FF2B5EF4-FFF2-40B4-BE49-F238E27FC236}">
+                <a16:creationId xmlns:a16="http://schemas.microsoft.com/office/drawing/2014/main" id="{27A961FD-D152-CCDD-292A-1CB14780EA1C}"/>
+              </a:ext>
+            </a:extLst>
+          </p:cNvPr>
+          <p:cNvGraphicFramePr>
+            <a:graphicFrameLocks noChangeAspect="1"/>
+          </p:cNvGraphicFramePr>
+          <p:nvPr>
+            <p:extLst>
+              <p:ext uri="{D42A27DB-BD31-4B8C-83A1-F6EECF244321}">
+                <p14:modId xmlns:p14="http://schemas.microsoft.com/office/powerpoint/2010/main" val="3807461940"/>
+              </p:ext>
+            </p:extLst>
+          </p:nvPr>
+        </p:nvGraphicFramePr>
+        <p:xfrm>
+          <a:off x="1539550" y="2649528"/>
+          <a:ext cx="8397550" cy="2562997"/>
+        </p:xfrm>
+        <a:graphic>
+          <a:graphicData uri="http://schemas.openxmlformats.org/presentationml/2006/ole">
+            <mc:AlternateContent xmlns:mc="http://schemas.openxmlformats.org/markup-compatibility/2006">
+              <mc:Choice xmlns:v="urn:schemas-microsoft-com:vml" Requires="v">
+                <p:oleObj name="Worksheet" r:id="rId3" imgW="4815698" imgH="1470723" progId="Excel.Sheet.12">
+                  <p:link updateAutomatic="1"/>
+                </p:oleObj>
+              </mc:Choice>
+              <mc:Fallback>
+                <p:oleObj name="Worksheet" r:id="rId3" imgW="4815698" imgH="1470723" progId="Excel.Sheet.12">
+                  <p:link updateAutomatic="1"/>
+                  <p:pic>
+                    <p:nvPicPr>
+                      <p:cNvPr id="0" name=""/>
+                      <p:cNvPicPr/>
+                      <p:nvPr/>
+                    </p:nvPicPr>
+                    <p:blipFill>
+                      <a:blip r:embed="rId4"/>
+                      <a:stretch>
+                        <a:fillRect/>
+                      </a:stretch>
+                    </p:blipFill>
+                    <p:spPr>
+                      <a:xfrm>
+                        <a:off x="1539550" y="2649528"/>
+                        <a:ext cx="8397550" cy="2562997"/>
+                      </a:xfrm>
+                      <a:prstGeom prst="rect">
+                        <a:avLst/>
+                      </a:prstGeom>
+                    </p:spPr>
+                  </p:pic>
+                </p:oleObj>
+              </mc:Fallback>
+            </mc:AlternateContent>
+          </a:graphicData>
+        </a:graphic>
+      </p:graphicFrame>
+    </p:spTree>
+    <p:extLst>
+      <p:ext uri="{BB962C8B-B14F-4D97-AF65-F5344CB8AC3E}">
+        <p14:creationId xmlns:p14="http://schemas.microsoft.com/office/powerpoint/2010/main" val="3673194700"/>
+      </p:ext>
+    </p:extLst>
+  </p:cSld>
+  <p:clrMapOvr>
+    <a:masterClrMapping/>
+  </p:clrMapOvr>
+  <mc:AlternateContent xmlns:mc="http://schemas.openxmlformats.org/markup-compatibility/2006">
+    <mc:Choice xmlns:p159="http://schemas.microsoft.com/office/powerpoint/2015/09/main" Requires="p159">
+      <p:transition xmlns:p14="http://schemas.microsoft.com/office/powerpoint/2010/main" spd="slow" p14:dur="2000">
+        <p159:morph option="byObject"/>
+      </p:transition>
+    </mc:Choice>
+    <mc:Fallback>
+      <p:transition spd="slow">
+        <p:fade/>
+      </p:transition>
+    </mc:Fallback>
+  </mc:AlternateContent>
+</p:sld>
+</file>
+
+<file path=ppt/slides/slide9.xml><?xml version="1.0" encoding="utf-8"?>
+<p:sld xmlns:a="http://schemas.openxmlformats.org/drawingml/2006/main" xmlns:r="http://schemas.openxmlformats.org/officeDocument/2006/relationships" xmlns:p="http://schemas.openxmlformats.org/presentationml/2006/main">
+  <p:cSld>
+    <p:spTree>
+      <p:nvGrpSpPr>
+        <p:cNvPr id="1" name=""/>
+        <p:cNvGrpSpPr/>
+        <p:nvPr/>
+      </p:nvGrpSpPr>
+      <p:grpSpPr>
+        <a:xfrm>
+          <a:off x="0" y="0"/>
+          <a:ext cx="0" cy="0"/>
+          <a:chOff x="0" y="0"/>
+          <a:chExt cx="0" cy="0"/>
+        </a:xfrm>
+      </p:grpSpPr>
+      <p:sp>
+        <p:nvSpPr>
+          <p:cNvPr id="2" name="Título 1">
+            <a:extLst>
+              <a:ext uri="{FF2B5EF4-FFF2-40B4-BE49-F238E27FC236}">
+                <a16:creationId xmlns:a16="http://schemas.microsoft.com/office/drawing/2014/main" id="{2FDD10A6-6C56-1D15-92A0-622B059FC5D3}"/>
+              </a:ext>
+            </a:extLst>
+          </p:cNvPr>
+          <p:cNvSpPr>
+            <a:spLocks noGrp="1"/>
+          </p:cNvSpPr>
+          <p:nvPr>
+            <p:ph type="title"/>
+          </p:nvPr>
+        </p:nvSpPr>
+        <p:spPr/>
+        <p:txBody>
+          <a:bodyPr>
+            <a:normAutofit/>
+          </a:bodyPr>
+          <a:lstStyle/>
+          <a:p>
+            <a:pPr algn="ctr"/>
+            <a:r>
+              <a:rPr lang="es-BO" sz="5400" dirty="0">
+                <a:solidFill>
+                  <a:srgbClr val="56FA04"/>
+                </a:solidFill>
+                <a:latin typeface="Algerian" panose="04020705040A02060702" pitchFamily="82" charset="0"/>
+              </a:rPr>
+              <a:t>CONTROL DE CALIDAD DE DATOS</a:t>
+            </a:r>
+            <a:endParaRPr lang="es-ES" sz="5400" dirty="0">
+              <a:solidFill>
+                <a:srgbClr val="56FA04"/>
+              </a:solidFill>
+              <a:latin typeface="Algerian" panose="04020705040A02060702" pitchFamily="82" charset="0"/>
+            </a:endParaRPr>
+          </a:p>
+        </p:txBody>
+      </p:sp>
+      <p:sp>
+        <p:nvSpPr>
+          <p:cNvPr id="3" name="Marcador de contenido 2">
+            <a:extLst>
+              <a:ext uri="{FF2B5EF4-FFF2-40B4-BE49-F238E27FC236}">
+                <a16:creationId xmlns:a16="http://schemas.microsoft.com/office/drawing/2014/main" id="{D26A52DB-0D42-33EE-6F1C-D405E1119F0B}"/>
+              </a:ext>
+            </a:extLst>
+          </p:cNvPr>
+          <p:cNvSpPr>
+            <a:spLocks noGrp="1"/>
+          </p:cNvSpPr>
+          <p:nvPr>
+            <p:ph idx="1"/>
+          </p:nvPr>
+        </p:nvSpPr>
+        <p:spPr/>
+        <p:txBody>
+          <a:bodyPr>
+            <a:normAutofit/>
+          </a:bodyPr>
+          <a:lstStyle/>
+          <a:p>
+            <a:pPr marL="0" indent="0">
+              <a:buNone/>
+            </a:pPr>
+            <a:r>
+              <a:rPr lang="es-BO" sz="3200" dirty="0"/>
+              <a:t>Escanea el código QR para acceder al repositorio del proyecto.</a:t>
+            </a:r>
+            <a:endParaRPr lang="es-ES" sz="3200" dirty="0"/>
+          </a:p>
+        </p:txBody>
+      </p:sp>
+      <p:pic>
+        <p:nvPicPr>
+          <p:cNvPr id="5" name="Imagen 4">
+            <a:extLst>
+              <a:ext uri="{FF2B5EF4-FFF2-40B4-BE49-F238E27FC236}">
+                <a16:creationId xmlns:a16="http://schemas.microsoft.com/office/drawing/2014/main" id="{CF065C57-0E8E-1E81-2F46-8C3AC42512D2}"/>
+              </a:ext>
+            </a:extLst>
+          </p:cNvPr>
+          <p:cNvPicPr>
+            <a:picLocks noChangeAspect="1"/>
+          </p:cNvPicPr>
+          <p:nvPr/>
+        </p:nvPicPr>
+        <p:blipFill>
+          <a:blip r:embed="rId3"/>
+          <a:stretch>
+            <a:fillRect/>
+          </a:stretch>
+        </p:blipFill>
+        <p:spPr>
+          <a:xfrm>
+            <a:off x="4277360" y="2788920"/>
+            <a:ext cx="2875671" cy="2875671"/>
+          </a:xfrm>
+          <a:prstGeom prst="rect">
+            <a:avLst/>
+          </a:prstGeom>
+        </p:spPr>
+      </p:pic>
+    </p:spTree>
+    <p:extLst>
+      <p:ext uri="{BB962C8B-B14F-4D97-AF65-F5344CB8AC3E}">
+        <p14:creationId xmlns:p14="http://schemas.microsoft.com/office/powerpoint/2010/main" val="2363979380"/>
+      </p:ext>
+    </p:extLst>
+  </p:cSld>
+  <p:clrMapOvr>
+    <a:masterClrMapping/>
+  </p:clrMapOvr>
+  <mc:AlternateContent xmlns:mc="http://schemas.openxmlformats.org/markup-compatibility/2006">
+    <mc:Choice xmlns:p159="http://schemas.microsoft.com/office/powerpoint/2015/09/main" Requires="p159">
+      <p:transition xmlns:p14="http://schemas.microsoft.com/office/powerpoint/2010/main" spd="slow" p14:dur="2000">
+        <p159:morph option="byObject"/>
+      </p:transition>
+    </mc:Choice>
+    <mc:Fallback>
       <p:transition spd="slow">
         <p:fade/>
       </p:transition>
@@ -5562,7 +6614,7 @@
   <wetp:taskpane dockstate="right" visibility="0" width="438" row="0">
     <wetp:webextensionref xmlns:r="http://schemas.openxmlformats.org/officeDocument/2006/relationships" r:id="rId1"/>
   </wetp:taskpane>
-  <wetp:taskpane dockstate="right" visibility="0" width="438" row="2">
+  <wetp:taskpane dockstate="right" visibility="0" width="438" row="0">
     <wetp:webextensionref xmlns:r="http://schemas.openxmlformats.org/officeDocument/2006/relationships" r:id="rId2"/>
   </wetp:taskpane>
 </wetp:taskpanes>
